--- a/demo_data/decision_trees_slides.pptx
+++ b/demo_data/decision_trees_slides.pptx
@@ -11,6 +11,7 @@
     <p:sldId id="259" r:id="rId11"/>
     <p:sldId id="260" r:id="rId12"/>
     <p:sldId id="261" r:id="rId13"/>
+    <p:sldId id="262" r:id="rId14"/>
   </p:sldIdLst>
   <p:sldSz cx="12191695" cy="6858000" type="screen4x3"/>
   <p:notesSz cx="6858000" cy="9144000"/>
@@ -743,6 +744,76 @@
 </file>
 
 <file path=ppt/notesSlides/notesSlide5.xml><?xml version="1.0" encoding="utf-8"?>
+<p:notes xmlns:a="http://schemas.openxmlformats.org/drawingml/2006/main" xmlns:p="http://schemas.openxmlformats.org/presentationml/2006/main" xmlns:r="http://schemas.openxmlformats.org/officeDocument/2006/relationships">
+  <p:cSld>
+    <p:spTree>
+      <p:nvGrpSpPr>
+        <p:cNvPr id="1" name=""/>
+        <p:cNvGrpSpPr/>
+        <p:nvPr/>
+      </p:nvGrpSpPr>
+      <p:grpSpPr>
+        <a:xfrm>
+          <a:off x="0" y="0"/>
+          <a:ext cx="0" cy="0"/>
+          <a:chOff x="0" y="0"/>
+          <a:chExt cx="0" cy="0"/>
+        </a:xfrm>
+      </p:grpSpPr>
+      <p:sp>
+        <p:nvSpPr>
+          <p:cNvPr id="2" name="Slide Image Placeholder 1"/>
+          <p:cNvSpPr>
+            <a:spLocks noGrp="1"/>
+          </p:cNvSpPr>
+          <p:nvPr>
+            <p:ph type="sldImg" idx="2"/>
+          </p:nvPr>
+        </p:nvSpPr>
+        <p:spPr/>
+      </p:sp>
+      <p:sp>
+        <p:nvSpPr>
+          <p:cNvPr id="3" name="Notes Placeholder 2"/>
+          <p:cNvSpPr>
+            <a:spLocks noGrp="1"/>
+          </p:cNvSpPr>
+          <p:nvPr>
+            <p:ph type="body" idx="3" sz="quarter"/>
+          </p:nvPr>
+        </p:nvSpPr>
+        <p:spPr/>
+        <p:txBody>
+          <a:bodyPr/>
+          <a:lstStyle/>
+          <a:p>
+            <a:r>
+              <a:t>Speaker notes for 'Results'.</a:t>
+            </a:r>
+          </a:p>
+        </p:txBody>
+      </p:sp>
+      <p:sp>
+        <p:nvSpPr>
+          <p:cNvPr id="4" name="Slide Number Placeholder 3"/>
+          <p:cNvSpPr>
+            <a:spLocks noGrp="1"/>
+          </p:cNvSpPr>
+          <p:nvPr>
+            <p:ph type="sldNum" idx="5" sz="quarter"/>
+          </p:nvPr>
+        </p:nvSpPr>
+        <p:spPr/>
+      </p:sp>
+    </p:spTree>
+  </p:cSld>
+  <p:clrMapOvr>
+    <a:masterClrMapping/>
+  </p:clrMapOvr>
+</p:notes>
+</file>
+
+<file path=ppt/notesSlides/notesSlide6.xml><?xml version="1.0" encoding="utf-8"?>
 <p:notes xmlns:a="http://schemas.openxmlformats.org/drawingml/2006/main" xmlns:p="http://schemas.openxmlformats.org/presentationml/2006/main" xmlns:r="http://schemas.openxmlformats.org/officeDocument/2006/relationships">
   <p:cSld>
     <p:spTree>
@@ -4200,6 +4271,101 @@
 </file>
 
 <file path=ppt/slides/slide6.xml><?xml version="1.0" encoding="utf-8"?>
+<p:sld xmlns:a="http://schemas.openxmlformats.org/drawingml/2006/main" xmlns:p="http://schemas.openxmlformats.org/presentationml/2006/main" xmlns:r="http://schemas.openxmlformats.org/officeDocument/2006/relationships">
+  <p:cSld>
+    <p:spTree>
+      <p:nvGrpSpPr>
+        <p:cNvPr id="1" name=""/>
+        <p:cNvGrpSpPr/>
+        <p:nvPr/>
+      </p:nvGrpSpPr>
+      <p:grpSpPr/>
+      <p:sp>
+        <p:nvSpPr>
+          <p:cNvPr id="2" name="Title 1"/>
+          <p:cNvSpPr>
+            <a:spLocks noGrp="1"/>
+          </p:cNvSpPr>
+          <p:nvPr>
+            <p:ph type="title"/>
+          </p:nvPr>
+        </p:nvSpPr>
+        <p:spPr/>
+        <p:txBody>
+          <a:bodyPr/>
+          <a:lstStyle/>
+          <a:p>
+            <a:r>
+              <a:t>Results</a:t>
+            </a:r>
+          </a:p>
+        </p:txBody>
+      </p:sp>
+      <p:sp>
+        <p:nvSpPr>
+          <p:cNvPr id="3" name="Content Placeholder 2"/>
+          <p:cNvSpPr>
+            <a:spLocks noGrp="1"/>
+          </p:cNvSpPr>
+          <p:nvPr>
+            <p:ph idx="1"/>
+          </p:nvPr>
+        </p:nvSpPr>
+        <p:spPr/>
+        <p:txBody>
+          <a:bodyPr/>
+          <a:lstStyle/>
+          <a:p>
+            <a:pPr>
+              <a:defRPr sz="2200"/>
+            </a:pPr>
+            <a:r>
+              <a:t>Random forests and neural networks performed best</a:t>
+            </a:r>
+          </a:p>
+          <a:p>
+            <a:pPr>
+              <a:defRPr sz="2200"/>
+            </a:pPr>
+            <a:r>
+              <a:t>See the accuracy chart on this slide</a:t>
+            </a:r>
+          </a:p>
+        </p:txBody>
+      </p:sp>
+      <p:pic>
+        <p:nvPicPr>
+          <p:cNvPr id="4" name="Picture 3" descr="model_accuracy_chart.png"/>
+          <p:cNvPicPr>
+            <a:picLocks noChangeAspect="1"/>
+          </p:cNvPicPr>
+          <p:nvPr/>
+        </p:nvPicPr>
+        <p:blipFill>
+          <a:blip r:embed="rId2"/>
+          <a:stretch>
+            <a:fillRect/>
+          </a:stretch>
+        </p:blipFill>
+        <p:spPr>
+          <a:xfrm>
+            <a:off x="6583680" y="1463040"/>
+            <a:ext cx="3914335" cy="3840480"/>
+          </a:xfrm>
+          <a:prstGeom prst="rect">
+            <a:avLst/>
+          </a:prstGeom>
+        </p:spPr>
+      </p:pic>
+    </p:spTree>
+  </p:cSld>
+  <p:clrMapOvr>
+    <a:masterClrMapping/>
+  </p:clrMapOvr>
+</p:sld>
+</file>
+
+<file path=ppt/slides/slide7.xml><?xml version="1.0" encoding="utf-8"?>
 <p:sld xmlns:a="http://schemas.openxmlformats.org/drawingml/2006/main" xmlns:p="http://schemas.openxmlformats.org/presentationml/2006/main" xmlns:r="http://schemas.openxmlformats.org/officeDocument/2006/relationships">
   <p:cSld>
     <p:spTree>
